--- a/stats_case_study/case_studies/19_multiple_testing_segments/presentation/case_study_presentation.pptx
+++ b/stats_case_study/case_studies/19_multiple_testing_segments/presentation/case_study_presentation.pptx
@@ -4855,7 +4855,7 @@
                 </a:solidFill>
                 <a:latin typeface="Calibri"/>
               </a:rPr>
-              <a:t>The spike of small p-values (right) says some segments truly respond; the flat part says many do not.</a:t>
+              <a:t>Red intervals (left) are the seven segments with p &lt; 0.05. The spike of small p-values (right) says some segments truly respond; the flat part says many do not.</a:t>
             </a:r>
           </a:p>
         </p:txBody>
